--- a/Chapitre_02_Hyperstatisme/Cy_06_02_Colle_04_Nacelle/images/Figures.pptx
+++ b/Chapitre_02_Hyperstatisme/Cy_06_02_Colle_04_Nacelle/images/Figures.pptx
@@ -271,7 +271,7 @@
           <a:p>
             <a:fld id="{4D9A7685-BDE6-4AED-978E-245902219CA8}" type="datetimeFigureOut">
               <a:rPr lang="fr-FR" smtClean="0"/>
-              <a:t>27/10/2023</a:t>
+              <a:t>01/10/2025</a:t>
             </a:fld>
             <a:endParaRPr lang="fr-FR"/>
           </a:p>
@@ -469,7 +469,7 @@
           <a:p>
             <a:fld id="{4D9A7685-BDE6-4AED-978E-245902219CA8}" type="datetimeFigureOut">
               <a:rPr lang="fr-FR" smtClean="0"/>
-              <a:t>27/10/2023</a:t>
+              <a:t>01/10/2025</a:t>
             </a:fld>
             <a:endParaRPr lang="fr-FR"/>
           </a:p>
@@ -677,7 +677,7 @@
           <a:p>
             <a:fld id="{4D9A7685-BDE6-4AED-978E-245902219CA8}" type="datetimeFigureOut">
               <a:rPr lang="fr-FR" smtClean="0"/>
-              <a:t>27/10/2023</a:t>
+              <a:t>01/10/2025</a:t>
             </a:fld>
             <a:endParaRPr lang="fr-FR"/>
           </a:p>
@@ -875,7 +875,7 @@
           <a:p>
             <a:fld id="{4D9A7685-BDE6-4AED-978E-245902219CA8}" type="datetimeFigureOut">
               <a:rPr lang="fr-FR" smtClean="0"/>
-              <a:t>27/10/2023</a:t>
+              <a:t>01/10/2025</a:t>
             </a:fld>
             <a:endParaRPr lang="fr-FR"/>
           </a:p>
@@ -1150,7 +1150,7 @@
           <a:p>
             <a:fld id="{4D9A7685-BDE6-4AED-978E-245902219CA8}" type="datetimeFigureOut">
               <a:rPr lang="fr-FR" smtClean="0"/>
-              <a:t>27/10/2023</a:t>
+              <a:t>01/10/2025</a:t>
             </a:fld>
             <a:endParaRPr lang="fr-FR"/>
           </a:p>
@@ -1415,7 +1415,7 @@
           <a:p>
             <a:fld id="{4D9A7685-BDE6-4AED-978E-245902219CA8}" type="datetimeFigureOut">
               <a:rPr lang="fr-FR" smtClean="0"/>
-              <a:t>27/10/2023</a:t>
+              <a:t>01/10/2025</a:t>
             </a:fld>
             <a:endParaRPr lang="fr-FR"/>
           </a:p>
@@ -1827,7 +1827,7 @@
           <a:p>
             <a:fld id="{4D9A7685-BDE6-4AED-978E-245902219CA8}" type="datetimeFigureOut">
               <a:rPr lang="fr-FR" smtClean="0"/>
-              <a:t>27/10/2023</a:t>
+              <a:t>01/10/2025</a:t>
             </a:fld>
             <a:endParaRPr lang="fr-FR"/>
           </a:p>
@@ -1968,7 +1968,7 @@
           <a:p>
             <a:fld id="{4D9A7685-BDE6-4AED-978E-245902219CA8}" type="datetimeFigureOut">
               <a:rPr lang="fr-FR" smtClean="0"/>
-              <a:t>27/10/2023</a:t>
+              <a:t>01/10/2025</a:t>
             </a:fld>
             <a:endParaRPr lang="fr-FR"/>
           </a:p>
@@ -2081,7 +2081,7 @@
           <a:p>
             <a:fld id="{4D9A7685-BDE6-4AED-978E-245902219CA8}" type="datetimeFigureOut">
               <a:rPr lang="fr-FR" smtClean="0"/>
-              <a:t>27/10/2023</a:t>
+              <a:t>01/10/2025</a:t>
             </a:fld>
             <a:endParaRPr lang="fr-FR"/>
           </a:p>
@@ -2392,7 +2392,7 @@
           <a:p>
             <a:fld id="{4D9A7685-BDE6-4AED-978E-245902219CA8}" type="datetimeFigureOut">
               <a:rPr lang="fr-FR" smtClean="0"/>
-              <a:t>27/10/2023</a:t>
+              <a:t>01/10/2025</a:t>
             </a:fld>
             <a:endParaRPr lang="fr-FR"/>
           </a:p>
@@ -2680,7 +2680,7 @@
           <a:p>
             <a:fld id="{4D9A7685-BDE6-4AED-978E-245902219CA8}" type="datetimeFigureOut">
               <a:rPr lang="fr-FR" smtClean="0"/>
-              <a:t>27/10/2023</a:t>
+              <a:t>01/10/2025</a:t>
             </a:fld>
             <a:endParaRPr lang="fr-FR"/>
           </a:p>
@@ -2921,7 +2921,7 @@
           <a:p>
             <a:fld id="{4D9A7685-BDE6-4AED-978E-245902219CA8}" type="datetimeFigureOut">
               <a:rPr lang="fr-FR" smtClean="0"/>
-              <a:t>27/10/2023</a:t>
+              <a:t>01/10/2025</a:t>
             </a:fld>
             <a:endParaRPr lang="fr-FR"/>
           </a:p>
@@ -4277,8 +4277,8 @@
           </a:fontRef>
         </p:style>
       </p:cxnSp>
-      <mc:AlternateContent xmlns:mc="http://schemas.openxmlformats.org/markup-compatibility/2006">
-        <mc:Choice xmlns:a14="http://schemas.microsoft.com/office/drawing/2010/main" Requires="a14">
+      <mc:AlternateContent xmlns:mc="http://schemas.openxmlformats.org/markup-compatibility/2006" xmlns:a14="http://schemas.microsoft.com/office/drawing/2010/main">
+        <mc:Choice Requires="a14">
           <p:sp>
             <p:nvSpPr>
               <p:cNvPr id="41" name="ZoneTexte 40">
@@ -4313,6 +4313,7 @@
                 </a:r>
               </a:p>
               <a:p>
+                <a:pPr/>
                 <a14:m>
                   <m:oMathPara xmlns:m="http://schemas.openxmlformats.org/officeDocument/2006/math">
                     <m:oMathParaPr>
@@ -4406,7 +4407,7 @@
             </p:txBody>
           </p:sp>
         </mc:Choice>
-        <mc:Fallback>
+        <mc:Fallback xmlns="">
           <p:sp>
             <p:nvSpPr>
               <p:cNvPr id="41" name="ZoneTexte 40">
@@ -4451,8 +4452,8 @@
           </p:sp>
         </mc:Fallback>
       </mc:AlternateContent>
-      <mc:AlternateContent xmlns:mc="http://schemas.openxmlformats.org/markup-compatibility/2006">
-        <mc:Choice xmlns:a14="http://schemas.microsoft.com/office/drawing/2010/main" Requires="a14">
+      <mc:AlternateContent xmlns:mc="http://schemas.openxmlformats.org/markup-compatibility/2006" xmlns:a14="http://schemas.microsoft.com/office/drawing/2010/main">
+        <mc:Choice Requires="a14">
           <p:sp>
             <p:nvSpPr>
               <p:cNvPr id="42" name="ZoneTexte 41">
@@ -4487,6 +4488,7 @@
                 </a:r>
               </a:p>
               <a:p>
+                <a:pPr/>
                 <a14:m>
                   <m:oMathPara xmlns:m="http://schemas.openxmlformats.org/officeDocument/2006/math">
                     <m:oMathParaPr>
@@ -4586,7 +4588,7 @@
             </p:txBody>
           </p:sp>
         </mc:Choice>
-        <mc:Fallback>
+        <mc:Fallback xmlns="">
           <p:sp>
             <p:nvSpPr>
               <p:cNvPr id="42" name="ZoneTexte 41">
@@ -4631,8 +4633,8 @@
           </p:sp>
         </mc:Fallback>
       </mc:AlternateContent>
-      <mc:AlternateContent xmlns:mc="http://schemas.openxmlformats.org/markup-compatibility/2006">
-        <mc:Choice xmlns:a14="http://schemas.microsoft.com/office/drawing/2010/main" Requires="a14">
+      <mc:AlternateContent xmlns:mc="http://schemas.openxmlformats.org/markup-compatibility/2006" xmlns:a14="http://schemas.microsoft.com/office/drawing/2010/main">
+        <mc:Choice Requires="a14">
           <p:sp>
             <p:nvSpPr>
               <p:cNvPr id="43" name="ZoneTexte 42">
@@ -4667,6 +4669,7 @@
                 </a:r>
               </a:p>
               <a:p>
+                <a:pPr/>
                 <a14:m>
                   <m:oMathPara xmlns:m="http://schemas.openxmlformats.org/officeDocument/2006/math">
                     <m:oMathParaPr>
@@ -4766,7 +4769,7 @@
             </p:txBody>
           </p:sp>
         </mc:Choice>
-        <mc:Fallback>
+        <mc:Fallback xmlns="">
           <p:sp>
             <p:nvSpPr>
               <p:cNvPr id="43" name="ZoneTexte 42">
@@ -4811,8 +4814,8 @@
           </p:sp>
         </mc:Fallback>
       </mc:AlternateContent>
-      <mc:AlternateContent xmlns:mc="http://schemas.openxmlformats.org/markup-compatibility/2006">
-        <mc:Choice xmlns:a14="http://schemas.microsoft.com/office/drawing/2010/main" Requires="a14">
+      <mc:AlternateContent xmlns:mc="http://schemas.openxmlformats.org/markup-compatibility/2006" xmlns:a14="http://schemas.microsoft.com/office/drawing/2010/main">
+        <mc:Choice Requires="a14">
           <p:sp>
             <p:nvSpPr>
               <p:cNvPr id="44" name="ZoneTexte 43">
@@ -4847,6 +4850,7 @@
                 </a:r>
               </a:p>
               <a:p>
+                <a:pPr/>
                 <a14:m>
                   <m:oMathPara xmlns:m="http://schemas.openxmlformats.org/officeDocument/2006/math">
                     <m:oMathParaPr>
@@ -4940,7 +4944,7 @@
             </p:txBody>
           </p:sp>
         </mc:Choice>
-        <mc:Fallback>
+        <mc:Fallback xmlns="">
           <p:sp>
             <p:nvSpPr>
               <p:cNvPr id="44" name="ZoneTexte 43">
@@ -4985,8 +4989,8 @@
           </p:sp>
         </mc:Fallback>
       </mc:AlternateContent>
-      <mc:AlternateContent xmlns:mc="http://schemas.openxmlformats.org/markup-compatibility/2006">
-        <mc:Choice xmlns:a14="http://schemas.microsoft.com/office/drawing/2010/main" Requires="a14">
+      <mc:AlternateContent xmlns:mc="http://schemas.openxmlformats.org/markup-compatibility/2006" xmlns:a14="http://schemas.microsoft.com/office/drawing/2010/main">
+        <mc:Choice Requires="a14">
           <p:sp>
             <p:nvSpPr>
               <p:cNvPr id="45" name="ZoneTexte 44">
@@ -5125,7 +5129,7 @@
             </p:txBody>
           </p:sp>
         </mc:Choice>
-        <mc:Fallback>
+        <mc:Fallback xmlns="">
           <p:sp>
             <p:nvSpPr>
               <p:cNvPr id="45" name="ZoneTexte 44">
@@ -5170,8 +5174,8 @@
           </p:sp>
         </mc:Fallback>
       </mc:AlternateContent>
-      <mc:AlternateContent xmlns:mc="http://schemas.openxmlformats.org/markup-compatibility/2006">
-        <mc:Choice xmlns:a14="http://schemas.microsoft.com/office/drawing/2010/main" Requires="a14">
+      <mc:AlternateContent xmlns:mc="http://schemas.openxmlformats.org/markup-compatibility/2006" xmlns:a14="http://schemas.microsoft.com/office/drawing/2010/main">
+        <mc:Choice Requires="a14">
           <p:sp>
             <p:nvSpPr>
               <p:cNvPr id="46" name="ZoneTexte 45">
@@ -5304,7 +5308,7 @@
             </p:txBody>
           </p:sp>
         </mc:Choice>
-        <mc:Fallback>
+        <mc:Fallback xmlns="">
           <p:sp>
             <p:nvSpPr>
               <p:cNvPr id="46" name="ZoneTexte 45">
@@ -5349,8 +5353,8 @@
           </p:sp>
         </mc:Fallback>
       </mc:AlternateContent>
-      <mc:AlternateContent xmlns:mc="http://schemas.openxmlformats.org/markup-compatibility/2006">
-        <mc:Choice xmlns:a14="http://schemas.microsoft.com/office/drawing/2010/main" Requires="a14">
+      <mc:AlternateContent xmlns:mc="http://schemas.openxmlformats.org/markup-compatibility/2006" xmlns:a14="http://schemas.microsoft.com/office/drawing/2010/main">
+        <mc:Choice Requires="a14">
           <p:sp>
             <p:nvSpPr>
               <p:cNvPr id="47" name="ZoneTexte 46">
@@ -5483,7 +5487,7 @@
             </p:txBody>
           </p:sp>
         </mc:Choice>
-        <mc:Fallback>
+        <mc:Fallback xmlns="">
           <p:sp>
             <p:nvSpPr>
               <p:cNvPr id="47" name="ZoneTexte 46">
@@ -5528,8 +5532,8 @@
           </p:sp>
         </mc:Fallback>
       </mc:AlternateContent>
-      <mc:AlternateContent xmlns:mc="http://schemas.openxmlformats.org/markup-compatibility/2006">
-        <mc:Choice xmlns:a14="http://schemas.microsoft.com/office/drawing/2010/main" Requires="a14">
+      <mc:AlternateContent xmlns:mc="http://schemas.openxmlformats.org/markup-compatibility/2006" xmlns:a14="http://schemas.microsoft.com/office/drawing/2010/main">
+        <mc:Choice Requires="a14">
           <p:sp>
             <p:nvSpPr>
               <p:cNvPr id="48" name="ZoneTexte 47">
@@ -5668,7 +5672,7 @@
             </p:txBody>
           </p:sp>
         </mc:Choice>
-        <mc:Fallback>
+        <mc:Fallback xmlns="">
           <p:sp>
             <p:nvSpPr>
               <p:cNvPr id="48" name="ZoneTexte 47">
@@ -5713,8 +5717,8 @@
           </p:sp>
         </mc:Fallback>
       </mc:AlternateContent>
-      <mc:AlternateContent xmlns:mc="http://schemas.openxmlformats.org/markup-compatibility/2006">
-        <mc:Choice xmlns:a14="http://schemas.microsoft.com/office/drawing/2010/main" Requires="a14">
+      <mc:AlternateContent xmlns:mc="http://schemas.openxmlformats.org/markup-compatibility/2006" xmlns:a14="http://schemas.microsoft.com/office/drawing/2010/main">
+        <mc:Choice Requires="a14">
           <p:sp>
             <p:nvSpPr>
               <p:cNvPr id="49" name="ZoneTexte 48">
@@ -5847,7 +5851,7 @@
             </p:txBody>
           </p:sp>
         </mc:Choice>
-        <mc:Fallback>
+        <mc:Fallback xmlns="">
           <p:sp>
             <p:nvSpPr>
               <p:cNvPr id="49" name="ZoneTexte 48">
@@ -6493,8 +6497,8 @@
           </a:fontRef>
         </p:style>
       </p:cxnSp>
-      <mc:AlternateContent xmlns:mc="http://schemas.openxmlformats.org/markup-compatibility/2006">
-        <mc:Choice xmlns:a14="http://schemas.microsoft.com/office/drawing/2010/main" Requires="a14">
+      <mc:AlternateContent xmlns:mc="http://schemas.openxmlformats.org/markup-compatibility/2006" xmlns:a14="http://schemas.microsoft.com/office/drawing/2010/main">
+        <mc:Choice Requires="a14">
           <p:sp>
             <p:nvSpPr>
               <p:cNvPr id="41" name="ZoneTexte 40">
@@ -6529,6 +6533,7 @@
                 </a:r>
               </a:p>
               <a:p>
+                <a:pPr/>
                 <a14:m>
                   <m:oMathPara xmlns:m="http://schemas.openxmlformats.org/officeDocument/2006/math">
                     <m:oMathParaPr>
@@ -6622,7 +6627,7 @@
             </p:txBody>
           </p:sp>
         </mc:Choice>
-        <mc:Fallback>
+        <mc:Fallback xmlns="">
           <p:sp>
             <p:nvSpPr>
               <p:cNvPr id="41" name="ZoneTexte 40">
@@ -6667,8 +6672,8 @@
           </p:sp>
         </mc:Fallback>
       </mc:AlternateContent>
-      <mc:AlternateContent xmlns:mc="http://schemas.openxmlformats.org/markup-compatibility/2006">
-        <mc:Choice xmlns:a14="http://schemas.microsoft.com/office/drawing/2010/main" Requires="a14">
+      <mc:AlternateContent xmlns:mc="http://schemas.openxmlformats.org/markup-compatibility/2006" xmlns:a14="http://schemas.microsoft.com/office/drawing/2010/main">
+        <mc:Choice Requires="a14">
           <p:sp>
             <p:nvSpPr>
               <p:cNvPr id="42" name="ZoneTexte 41">
@@ -6703,6 +6708,7 @@
                 </a:r>
               </a:p>
               <a:p>
+                <a:pPr/>
                 <a14:m>
                   <m:oMathPara xmlns:m="http://schemas.openxmlformats.org/officeDocument/2006/math">
                     <m:oMathParaPr>
@@ -6802,7 +6808,7 @@
             </p:txBody>
           </p:sp>
         </mc:Choice>
-        <mc:Fallback>
+        <mc:Fallback xmlns="">
           <p:sp>
             <p:nvSpPr>
               <p:cNvPr id="42" name="ZoneTexte 41">
@@ -6847,8 +6853,8 @@
           </p:sp>
         </mc:Fallback>
       </mc:AlternateContent>
-      <mc:AlternateContent xmlns:mc="http://schemas.openxmlformats.org/markup-compatibility/2006">
-        <mc:Choice xmlns:a14="http://schemas.microsoft.com/office/drawing/2010/main" Requires="a14">
+      <mc:AlternateContent xmlns:mc="http://schemas.openxmlformats.org/markup-compatibility/2006" xmlns:a14="http://schemas.microsoft.com/office/drawing/2010/main">
+        <mc:Choice Requires="a14">
           <p:sp>
             <p:nvSpPr>
               <p:cNvPr id="47" name="ZoneTexte 46">
@@ -6981,7 +6987,7 @@
             </p:txBody>
           </p:sp>
         </mc:Choice>
-        <mc:Fallback>
+        <mc:Fallback xmlns="">
           <p:sp>
             <p:nvSpPr>
               <p:cNvPr id="47" name="ZoneTexte 46">
@@ -7026,8 +7032,8 @@
           </p:sp>
         </mc:Fallback>
       </mc:AlternateContent>
-      <mc:AlternateContent xmlns:mc="http://schemas.openxmlformats.org/markup-compatibility/2006">
-        <mc:Choice xmlns:a14="http://schemas.microsoft.com/office/drawing/2010/main" Requires="a14">
+      <mc:AlternateContent xmlns:mc="http://schemas.openxmlformats.org/markup-compatibility/2006" xmlns:a14="http://schemas.microsoft.com/office/drawing/2010/main">
+        <mc:Choice Requires="a14">
           <p:sp>
             <p:nvSpPr>
               <p:cNvPr id="48" name="ZoneTexte 47">
@@ -7166,7 +7172,7 @@
             </p:txBody>
           </p:sp>
         </mc:Choice>
-        <mc:Fallback>
+        <mc:Fallback xmlns="">
           <p:sp>
             <p:nvSpPr>
               <p:cNvPr id="48" name="ZoneTexte 47">
@@ -7211,8 +7217,8 @@
           </p:sp>
         </mc:Fallback>
       </mc:AlternateContent>
-      <mc:AlternateContent xmlns:mc="http://schemas.openxmlformats.org/markup-compatibility/2006">
-        <mc:Choice xmlns:a14="http://schemas.microsoft.com/office/drawing/2010/main" Requires="a14">
+      <mc:AlternateContent xmlns:mc="http://schemas.openxmlformats.org/markup-compatibility/2006" xmlns:a14="http://schemas.microsoft.com/office/drawing/2010/main">
+        <mc:Choice Requires="a14">
           <p:sp>
             <p:nvSpPr>
               <p:cNvPr id="49" name="ZoneTexte 48">
@@ -7345,7 +7351,7 @@
             </p:txBody>
           </p:sp>
         </mc:Choice>
-        <mc:Fallback>
+        <mc:Fallback xmlns="">
           <p:sp>
             <p:nvSpPr>
               <p:cNvPr id="49" name="ZoneTexte 48">
@@ -7717,8 +7723,8 @@
           </a:fontRef>
         </p:style>
       </p:cxnSp>
-      <mc:AlternateContent xmlns:mc="http://schemas.openxmlformats.org/markup-compatibility/2006">
-        <mc:Choice xmlns:a14="http://schemas.microsoft.com/office/drawing/2010/main" Requires="a14">
+      <mc:AlternateContent xmlns:mc="http://schemas.openxmlformats.org/markup-compatibility/2006" xmlns:a14="http://schemas.microsoft.com/office/drawing/2010/main">
+        <mc:Choice Requires="a14">
           <p:sp>
             <p:nvSpPr>
               <p:cNvPr id="56" name="ZoneTexte 55">
@@ -7753,6 +7759,7 @@
                 </a:r>
               </a:p>
               <a:p>
+                <a:pPr/>
                 <a14:m>
                   <m:oMathPara xmlns:m="http://schemas.openxmlformats.org/officeDocument/2006/math">
                     <m:oMathParaPr>
@@ -7852,7 +7859,7 @@
             </p:txBody>
           </p:sp>
         </mc:Choice>
-        <mc:Fallback>
+        <mc:Fallback xmlns="">
           <p:sp>
             <p:nvSpPr>
               <p:cNvPr id="56" name="ZoneTexte 55">
@@ -7897,8 +7904,8 @@
           </p:sp>
         </mc:Fallback>
       </mc:AlternateContent>
-      <mc:AlternateContent xmlns:mc="http://schemas.openxmlformats.org/markup-compatibility/2006">
-        <mc:Choice xmlns:a14="http://schemas.microsoft.com/office/drawing/2010/main" Requires="a14">
+      <mc:AlternateContent xmlns:mc="http://schemas.openxmlformats.org/markup-compatibility/2006" xmlns:a14="http://schemas.microsoft.com/office/drawing/2010/main">
+        <mc:Choice Requires="a14">
           <p:sp>
             <p:nvSpPr>
               <p:cNvPr id="57" name="ZoneTexte 56">
@@ -7933,6 +7940,7 @@
                 </a:r>
               </a:p>
               <a:p>
+                <a:pPr/>
                 <a14:m>
                   <m:oMathPara xmlns:m="http://schemas.openxmlformats.org/officeDocument/2006/math">
                     <m:oMathParaPr>
@@ -8026,7 +8034,7 @@
             </p:txBody>
           </p:sp>
         </mc:Choice>
-        <mc:Fallback>
+        <mc:Fallback xmlns="">
           <p:sp>
             <p:nvSpPr>
               <p:cNvPr id="57" name="ZoneTexte 56">
@@ -8071,8 +8079,8 @@
           </p:sp>
         </mc:Fallback>
       </mc:AlternateContent>
-      <mc:AlternateContent xmlns:mc="http://schemas.openxmlformats.org/markup-compatibility/2006">
-        <mc:Choice xmlns:a14="http://schemas.microsoft.com/office/drawing/2010/main" Requires="a14">
+      <mc:AlternateContent xmlns:mc="http://schemas.openxmlformats.org/markup-compatibility/2006" xmlns:a14="http://schemas.microsoft.com/office/drawing/2010/main">
+        <mc:Choice Requires="a14">
           <p:sp>
             <p:nvSpPr>
               <p:cNvPr id="58" name="ZoneTexte 57">
@@ -8205,7 +8213,7 @@
             </p:txBody>
           </p:sp>
         </mc:Choice>
-        <mc:Fallback>
+        <mc:Fallback xmlns="">
           <p:sp>
             <p:nvSpPr>
               <p:cNvPr id="58" name="ZoneTexte 57">
@@ -8532,8 +8540,8 @@
           </a:fontRef>
         </p:style>
       </p:cxnSp>
-      <mc:AlternateContent xmlns:mc="http://schemas.openxmlformats.org/markup-compatibility/2006">
-        <mc:Choice xmlns:a14="http://schemas.microsoft.com/office/drawing/2010/main" Requires="a14">
+      <mc:AlternateContent xmlns:mc="http://schemas.openxmlformats.org/markup-compatibility/2006" xmlns:a14="http://schemas.microsoft.com/office/drawing/2010/main">
+        <mc:Choice Requires="a14">
           <p:sp>
             <p:nvSpPr>
               <p:cNvPr id="77" name="ZoneTexte 76">
@@ -8741,7 +8749,7 @@
             </p:txBody>
           </p:sp>
         </mc:Choice>
-        <mc:Fallback>
+        <mc:Fallback xmlns="">
           <p:sp>
             <p:nvSpPr>
               <p:cNvPr id="77" name="ZoneTexte 76">
@@ -8786,8 +8794,8 @@
           </p:sp>
         </mc:Fallback>
       </mc:AlternateContent>
-      <mc:AlternateContent xmlns:mc="http://schemas.openxmlformats.org/markup-compatibility/2006">
-        <mc:Choice xmlns:a14="http://schemas.microsoft.com/office/drawing/2010/main" Requires="a14">
+      <mc:AlternateContent xmlns:mc="http://schemas.openxmlformats.org/markup-compatibility/2006" xmlns:a14="http://schemas.microsoft.com/office/drawing/2010/main">
+        <mc:Choice Requires="a14">
           <p:sp>
             <p:nvSpPr>
               <p:cNvPr id="78" name="ZoneTexte 77">
@@ -8920,7 +8928,7 @@
             </p:txBody>
           </p:sp>
         </mc:Choice>
-        <mc:Fallback>
+        <mc:Fallback xmlns="">
           <p:sp>
             <p:nvSpPr>
               <p:cNvPr id="78" name="ZoneTexte 77">
@@ -9155,7 +9163,7 @@
             <p:spPr>
               <a:xfrm>
                 <a:off x="10111959" y="2406685"/>
-                <a:ext cx="1128579" cy="553998"/>
+                <a:ext cx="1112805" cy="400110"/>
               </a:xfrm>
               <a:prstGeom prst="rect">
                 <a:avLst/>
@@ -9170,7 +9178,7 @@
               <a:p>
                 <a:r>
                   <a:rPr lang="fr-FR" sz="1000" dirty="0"/>
-                  <a:t>Linéaire rectiligne</a:t>
+                  <a:t>Sphère – plan</a:t>
                 </a:r>
               </a:p>
               <a:p>
@@ -9263,87 +9271,6 @@
                 </a14:m>
                 <a:endParaRPr lang="fr-FR" sz="1000" dirty="0"/>
               </a:p>
-              <a:p>
-                <a:r>
-                  <a:rPr lang="fr-FR" sz="1000" dirty="0"/>
-                  <a:t>Direction </a:t>
-                </a:r>
-                <a14:m>
-                  <m:oMath xmlns:m="http://schemas.openxmlformats.org/officeDocument/2006/math">
-                    <m:r>
-                      <a:rPr lang="fr-FR" sz="1000" b="0" i="1" smtClean="0">
-                        <a:latin typeface="Cambria Math" panose="02040503050406030204" pitchFamily="18" charset="0"/>
-                      </a:rPr>
-                      <m:t>(</m:t>
-                    </m:r>
-                    <m:sSub>
-                      <m:sSubPr>
-                        <m:ctrlPr>
-                          <a:rPr lang="fr-FR" sz="1000" b="0" i="1" smtClean="0">
-                            <a:latin typeface="Cambria Math" panose="02040503050406030204" pitchFamily="18" charset="0"/>
-                          </a:rPr>
-                        </m:ctrlPr>
-                      </m:sSubPr>
-                      <m:e>
-                        <m:r>
-                          <a:rPr lang="fr-FR" sz="1000" b="0" i="1" smtClean="0">
-                            <a:latin typeface="Cambria Math" panose="02040503050406030204" pitchFamily="18" charset="0"/>
-                          </a:rPr>
-                          <m:t>𝐶</m:t>
-                        </m:r>
-                      </m:e>
-                      <m:sub>
-                        <m:r>
-                          <a:rPr lang="fr-FR" sz="1000" b="0" i="1" smtClean="0">
-                            <a:latin typeface="Cambria Math" panose="02040503050406030204" pitchFamily="18" charset="0"/>
-                          </a:rPr>
-                          <m:t>1</m:t>
-                        </m:r>
-                      </m:sub>
-                    </m:sSub>
-                    <m:sSubSup>
-                      <m:sSubSupPr>
-                        <m:ctrlPr>
-                          <a:rPr lang="fr-FR" sz="1000" b="0" i="1" smtClean="0">
-                            <a:latin typeface="Cambria Math" panose="02040503050406030204" pitchFamily="18" charset="0"/>
-                          </a:rPr>
-                        </m:ctrlPr>
-                      </m:sSubSupPr>
-                      <m:e>
-                        <m:r>
-                          <a:rPr lang="fr-FR" sz="1000" b="0" i="1" smtClean="0">
-                            <a:latin typeface="Cambria Math" panose="02040503050406030204" pitchFamily="18" charset="0"/>
-                          </a:rPr>
-                          <m:t>𝐶</m:t>
-                        </m:r>
-                      </m:e>
-                      <m:sub>
-                        <m:r>
-                          <a:rPr lang="fr-FR" sz="1000" b="0" i="1" smtClean="0">
-                            <a:latin typeface="Cambria Math" panose="02040503050406030204" pitchFamily="18" charset="0"/>
-                          </a:rPr>
-                          <m:t>1</m:t>
-                        </m:r>
-                      </m:sub>
-                      <m:sup>
-                        <m:r>
-                          <a:rPr lang="fr-FR" sz="1000" b="0" i="1" smtClean="0">
-                            <a:latin typeface="Cambria Math" panose="02040503050406030204" pitchFamily="18" charset="0"/>
-                          </a:rPr>
-                          <m:t>′</m:t>
-                        </m:r>
-                      </m:sup>
-                    </m:sSubSup>
-                    <m:r>
-                      <a:rPr lang="fr-FR" sz="1000" b="0" i="1" smtClean="0">
-                        <a:latin typeface="Cambria Math" panose="02040503050406030204" pitchFamily="18" charset="0"/>
-                      </a:rPr>
-                      <m:t>)</m:t>
-                    </m:r>
-                  </m:oMath>
-                </a14:m>
-                <a:endParaRPr lang="fr-FR" sz="1000" dirty="0"/>
-              </a:p>
             </p:txBody>
           </p:sp>
         </mc:Choice>
@@ -9365,7 +9292,7 @@
             <p:spPr>
               <a:xfrm>
                 <a:off x="10111959" y="2406685"/>
-                <a:ext cx="1128579" cy="553998"/>
+                <a:ext cx="1112805" cy="400110"/>
               </a:xfrm>
               <a:prstGeom prst="rect">
                 <a:avLst/>
@@ -9373,7 +9300,7 @@
               <a:blipFill>
                 <a:blip r:embed="rId12"/>
                 <a:stretch>
-                  <a:fillRect b="-5495"/>
+                  <a:fillRect b="-9231"/>
                 </a:stretch>
               </a:blipFill>
             </p:spPr>
